--- a/public/study/cse513/downloads/week-09.pptx
+++ b/public/study/cse513/downloads/week-09.pptx
@@ -3178,7 +3178,7 @@
           </a:p>
           <a:p xmlns:a="http://schemas.openxmlformats.org/drawingml/2006/main">
             <a:r>
-              <a:t>Aktiviteler ve lab ile 2–2.5 saat planla. Resmi not veya submission deadline yok. İlk feedback: hangi boundary karıştı, hangi senaryo yardımcı oldu, kaynak/bütçe ayrımı açık mı? Sonraki dersin amacı farklı katmanların iş yükünü uçtan uca değerlendirmek.</a:t>
+              <a:t>Aktiviteler ve lab ile 2–2.5 saat planla. Resmi not veya submission deadline yok. İlk feedback: hangi boundary karıştı, hangi senaryo yardımcı oldu, kaynak/bütçe ayrımı açık mı? Sonraki hafta distributed systems konusuna geçiyoruz: messages/RPC, timeouts, partial failure, olay sıralaması ve replication/consistency.</a:t>
             </a:r>
           </a:p>
           <a:p xmlns:a="http://schemas.openxmlformats.org/drawingml/2006/main">
